--- a/assets/pptx/catalog-341.pptx
+++ b/assets/pptx/catalog-341.pptx
@@ -3284,7 +3284,7 @@
                 <a:ea typeface="Ebrima"/>
                 <a:cs typeface="Ebrima"/>
               </a:rPr>
-              <a:t>አያልቅ የአንተ ሥራ (2x)</a:t>
+              <a:t>አያልቅ የአንተ ሥራ 2x</a:t>
             </a:r>
           </a:p>
           <a:p>
@@ -3302,7 +3302,7 @@
                 <a:ea typeface="Ebrima"/>
                 <a:cs typeface="Ebrima"/>
               </a:rPr>
-              <a:t>አያልቅ የአንተ ስራ (4x)</a:t>
+              <a:t>አያልቅ የአንተ ስራ 4x</a:t>
             </a:r>
           </a:p>
         </p:txBody>
@@ -3423,7 +3423,7 @@
                 <a:ea typeface="Ebrima"/>
                 <a:cs typeface="Ebrima"/>
               </a:rPr>
-              <a:t>ስራው እንዲህ ያማረው ስሙ እግዚአብሔር ነዉ (2x)</a:t>
+              <a:t>ስራው እንዲህ ያማረው ስሙ እግዚአብሔር ነዉ 2x</a:t>
             </a:r>
           </a:p>
         </p:txBody>
@@ -3526,7 +3526,7 @@
                 <a:ea typeface="Ebrima"/>
                 <a:cs typeface="Ebrima"/>
               </a:rPr>
-              <a:t>አያልቅ የአንተ ሥራ (2x)</a:t>
+              <a:t>አያልቅ የአንተ ሥራ 2x</a:t>
             </a:r>
           </a:p>
           <a:p>
@@ -3544,7 +3544,7 @@
                 <a:ea typeface="Ebrima"/>
                 <a:cs typeface="Ebrima"/>
               </a:rPr>
-              <a:t>አያልቅ የአንተ ስራ (4x)</a:t>
+              <a:t>አያልቅ የአንተ ስራ 4x</a:t>
             </a:r>
           </a:p>
         </p:txBody>
@@ -3665,7 +3665,7 @@
                 <a:ea typeface="Ebrima"/>
                 <a:cs typeface="Ebrima"/>
               </a:rPr>
-              <a:t>ማስተዋሉ ረቂቅ ኃይሉ እጅግ ብዙ ነው (2x)</a:t>
+              <a:t>ማስተዋሉ ረቂቅ ኃይሉ እጅግ ብዙ ነው 2x</a:t>
             </a:r>
           </a:p>
         </p:txBody>
@@ -3768,7 +3768,7 @@
                 <a:ea typeface="Ebrima"/>
                 <a:cs typeface="Ebrima"/>
               </a:rPr>
-              <a:t>አያልቅ የአንተ ሥራ (2x)</a:t>
+              <a:t>አያልቅ የአንተ ሥራ 2x</a:t>
             </a:r>
           </a:p>
           <a:p>
@@ -3786,7 +3786,7 @@
                 <a:ea typeface="Ebrima"/>
                 <a:cs typeface="Ebrima"/>
               </a:rPr>
-              <a:t>አያልቅ የአንተ ስራ (4x)</a:t>
+              <a:t>አያልቅ የአንተ ስራ 4x</a:t>
             </a:r>
           </a:p>
         </p:txBody>
@@ -3907,7 +3907,7 @@
                 <a:ea typeface="Ebrima"/>
                 <a:cs typeface="Ebrima"/>
               </a:rPr>
-              <a:t>ለዘላለም ነዋሪ መለወጥ የማያውቁው (2x)</a:t>
+              <a:t>ለዘላለም ነዋሪ መለወጥ የማያውቁው 2x</a:t>
             </a:r>
           </a:p>
         </p:txBody>
@@ -4010,7 +4010,7 @@
                 <a:ea typeface="Ebrima"/>
                 <a:cs typeface="Ebrima"/>
               </a:rPr>
-              <a:t>ከቤቱ በረከት ስለረካች ነፍሴ (2x)</a:t>
+              <a:t>ከቤቱ በረከት ስለረካች ነፍሴ 2x</a:t>
             </a:r>
           </a:p>
         </p:txBody>
@@ -4185,7 +4185,7 @@
                 <a:ea typeface="Ebrima"/>
                 <a:cs typeface="Ebrima"/>
               </a:rPr>
-              <a:t>ርሀቤም ጥማቴም የሆነው (16x)</a:t>
+              <a:t>ርሀቤም ጥማቴም የሆነው 16x</a:t>
             </a:r>
           </a:p>
         </p:txBody>
